--- a/data/documents/pptx/quarterly_pe_review_q1.pptx
+++ b/data/documents/pptx/quarterly_pe_review_q1.pptx
@@ -650,7 +650,7 @@
           <a:lstStyle/>
           <a:p>
             <a:r>
-              <a:t>The timeline is extremely tight with zero margin for error. Rev B silicon arrival on April 21 is the foundational milestone for customer audit approval.</a:t>
+              <a:t>The timeline is extremely tight with zero margin for error. Rev B silicon arrival on April 19 is the foundational milestone for customer audit approval.</a:t>
             </a:r>
           </a:p>
         </p:txBody>
@@ -4027,7 +4027,7 @@
           <a:lstStyle/>
           <a:p>
             <a:r>
-              <a:t>PE Division Quarterly Review — Q1 2024</a:t>
+              <a:t>PE Division Quarterly Review — Q1 2026</a:t>
             </a:r>
           </a:p>
         </p:txBody>
@@ -4078,7 +4078,7 @@
             </a:r>
             <a:r>
               <a:rPr sz="1800" b="0" i="0"/>
-              <a:t> March 28, 2024</a:t>
+              <a:t> March 26, 2026</a:t>
             </a:r>
           </a:p>
         </p:txBody>
@@ -4155,7 +4155,7 @@
             </a:r>
             <a:r>
               <a:rPr sz="2000" b="0" i="0"/>
-              <a:t> Product Engineering Division Q1 2024 Executive Review</a:t>
+              <a:t> Product Engineering Division Q1 2026 Executive Review</a:t>
             </a:r>
           </a:p>
           <a:p>
@@ -4191,7 +4191,7 @@
             <a:pPr lvl="1"/>
             <a:r>
               <a:rPr sz="1800" b="0" i="0"/>
-              <a:t>First silicon arrived Jan 2024; initial wafer sort yield of 41.2% recovered to 58.2% via Penang Fab CMP optimization.</a:t>
+              <a:t>First silicon arrived Jan 2026; initial wafer sort yield of 41.2% recovered to 58.2% via Penang Fab CMP optimization.</a:t>
             </a:r>
           </a:p>
           <a:p>
@@ -4205,14 +4205,14 @@
             <a:pPr lvl="1"/>
             <a:r>
               <a:rPr sz="1800" b="0" i="0"/>
-              <a:t>Emergency Rev B redesign committed to mask shop on March 23; silicon arrival locked for April 21.</a:t>
+              <a:t>Emergency Rev B redesign committed to mask shop on March 21; silicon arrival locked for April 19.</a:t>
             </a:r>
           </a:p>
           <a:p>
             <a:pPr lvl="1"/>
             <a:r>
               <a:rPr sz="1800" b="0" i="0"/>
-              <a:t>Team alignment and engineering containment executing to maintain NovaDrive Motors June 2024 SOP.</a:t>
+              <a:t>Team alignment and engineering containment executing to maintain NovaDrive Motors June 2026 SOP.</a:t>
             </a:r>
           </a:p>
         </p:txBody>
@@ -4436,7 +4436,7 @@
             </a:r>
             <a:r>
               <a:rPr sz="1600" b="0" i="0"/>
-              <a:t> High-Voltage Inverter Controller for NovaDrive Motors 2025 EV Platform.</a:t>
+              <a:t> High-Voltage Inverter Controller for NovaDrive Motors 2027 EV Platform.</a:t>
             </a:r>
           </a:p>
           <a:p>
@@ -4461,7 +4461,7 @@
             <a:pPr lvl="1"/>
             <a:r>
               <a:rPr sz="1400" b="0" i="1"/>
-              <a:t>Jan 08:</a:t>
+              <a:t>Jan 05:</a:t>
             </a:r>
             <a:r>
               <a:rPr sz="1400" b="0" i="0"/>
@@ -4472,7 +4472,7 @@
             <a:pPr lvl="1"/>
             <a:r>
               <a:rPr sz="1400" b="0" i="1"/>
-              <a:t>Jan 15:</a:t>
+              <a:t>Jan 12:</a:t>
             </a:r>
             <a:r>
               <a:rPr sz="1400" b="0" i="0"/>
@@ -4483,7 +4483,7 @@
             <a:pPr lvl="1"/>
             <a:r>
               <a:rPr sz="1400" b="0" i="1"/>
-              <a:t>Feb 05:</a:t>
+              <a:t>Feb 02:</a:t>
             </a:r>
             <a:r>
               <a:rPr sz="1400" b="0" i="0"/>
@@ -4494,7 +4494,7 @@
             <a:pPr lvl="1"/>
             <a:r>
               <a:rPr sz="1400" b="0" i="1"/>
-              <a:t>Mar 01:</a:t>
+              <a:t>Feb 27:</a:t>
             </a:r>
             <a:r>
               <a:rPr sz="1400" b="0" i="0"/>
@@ -4505,7 +4505,7 @@
             <a:pPr lvl="1"/>
             <a:r>
               <a:rPr sz="1400" b="0" i="1"/>
-              <a:t>Mar 11:</a:t>
+              <a:t>Mar 9:</a:t>
             </a:r>
             <a:r>
               <a:rPr sz="1400" b="0" i="0"/>
@@ -4516,7 +4516,7 @@
             <a:pPr lvl="1"/>
             <a:r>
               <a:rPr sz="1400" b="0" i="1"/>
-              <a:t>Mar 23:</a:t>
+              <a:t>Mar 21:</a:t>
             </a:r>
             <a:r>
               <a:rPr sz="1400" b="0" i="0"/>
@@ -4527,7 +4527,7 @@
             <a:pPr lvl="1"/>
             <a:r>
               <a:rPr sz="1400" b="0" i="1"/>
-              <a:t>Apr 21 (Target):</a:t>
+              <a:t>Apr 19 (Target):</a:t>
             </a:r>
             <a:r>
               <a:rPr sz="1400" b="0" i="0"/>
@@ -4538,7 +4538,7 @@
             <a:pPr lvl="1"/>
             <a:r>
               <a:rPr sz="1400" b="0" i="1"/>
-              <a:t>May 12 (Target):</a:t>
+              <a:t>May 10 (Target):</a:t>
             </a:r>
             <a:r>
               <a:rPr sz="1400" b="0" i="0"/>
@@ -4549,7 +4549,7 @@
             <a:pPr lvl="1"/>
             <a:r>
               <a:rPr sz="1400" b="0" i="1"/>
-              <a:t>Jun 2024:</a:t>
+              <a:t>Jun 2026:</a:t>
             </a:r>
             <a:r>
               <a:rPr sz="1400" b="0" i="0"/>
@@ -4821,7 +4821,7 @@
             <a:pPr lvl="1"/>
             <a:r>
               <a:rPr sz="1600" b="0" i="0"/>
-              <a:t>500-Hour Readout: 3/231 Failed (catastrophic pin short to ground on Units U042, U089, U115).</a:t>
+              <a:t>500-Hour Readout: 3/231 Failed (catastrophic pin short to ground on Units U162, U189, U215).</a:t>
             </a:r>
           </a:p>
           <a:p>
@@ -5103,7 +5103,7 @@
             </a:r>
             <a:r>
               <a:rPr sz="1800" b="0" i="0"/>
-              <a:t> Full transparency; 8D report submitted April 7; daily technical touchpoints via Tom Harris.</a:t>
+              <a:t> Full transparency; 8D report submitted April 5; daily technical touchpoints via Tom Harris.</a:t>
             </a:r>
           </a:p>
           <a:p>
@@ -5166,7 +5166,7 @@
           <a:p>
             <a:r>
               <a:rPr sz="3000"/>
-              <a:t>Q2 2024 Objectives &amp; Milestones</a:t>
+              <a:t>Q2 2026 Objectives &amp; Milestones</a:t>
             </a:r>
           </a:p>
         </p:txBody>
@@ -5194,7 +5194,7 @@
             <a:pPr/>
             <a:r>
               <a:rPr sz="2000" b="1" i="0"/>
-              <a:t>April 21:</a:t>
+              <a:t>April 19:</a:t>
             </a:r>
             <a:r>
               <a:rPr sz="2000" b="0" i="0"/>
@@ -5205,18 +5205,18 @@
             <a:pPr/>
             <a:r>
               <a:rPr sz="2000" b="1" i="0"/>
-              <a:t>April 28:</a:t>
+              <a:t>April 26:</a:t>
             </a:r>
             <a:r>
               <a:rPr sz="2000" b="0" i="0"/>
-              <a:t> Complete accelerated reliability readout (HTOL/TC/HAST) with zero failures.</a:t>
+              <a:t> First Rev B reliability readout (early-life burn-in and HAST) with zero failures.</a:t>
             </a:r>
           </a:p>
           <a:p>
             <a:pPr/>
             <a:r>
               <a:rPr sz="2000" b="1" i="0"/>
-              <a:t>May 05:</a:t>
+              <a:t>May 03:</a:t>
             </a:r>
             <a:r>
               <a:rPr sz="2000" b="0" i="0"/>
@@ -5227,7 +5227,7 @@
             <a:pPr/>
             <a:r>
               <a:rPr sz="2000" b="1" i="0"/>
-              <a:t>May 12:</a:t>
+              <a:t>May 10:</a:t>
             </a:r>
             <a:r>
               <a:rPr sz="2000" b="0" i="0"/>
@@ -5238,7 +5238,7 @@
             <a:pPr/>
             <a:r>
               <a:rPr sz="2000" b="1" i="0"/>
-              <a:t>May 20:</a:t>
+              <a:t>May 18:</a:t>
             </a:r>
             <a:r>
               <a:rPr sz="2000" b="0" i="0"/>
@@ -5249,11 +5249,11 @@
             <a:pPr/>
             <a:r>
               <a:rPr sz="2000" b="1" i="0"/>
-              <a:t>June 2024:</a:t>
+              <a:t>June 2026:</a:t>
             </a:r>
             <a:r>
               <a:rPr sz="2000" b="0" i="0"/>
-              <a:t> Authorize commercial mass production release (200k units/month).</a:t>
+              <a:t> 1000-hour HTOL sign-off (June 2) and commercial mass production release (200k units/month).</a:t>
             </a:r>
           </a:p>
         </p:txBody>
